--- a/bids/cmd-post-ndi-W50S7626QA001/proposal/exports/cmd-post-ndi-W50S7626QA001-pitch-deck.pptx
+++ b/bids/cmd-post-ndi-W50S7626QA001/proposal/exports/cmd-post-ndi-W50S7626QA001-pitch-deck.pptx
@@ -3424,7 +3424,7 @@
                 </a:solidFill>
                 <a:latin typeface="Calibri"/>
               </a:rPr>
-              <a:t>Submission date __________   ·   Document prepared 2026-05-23</a:t>
+              <a:t>Submission date __________   ·   Document prepared 2026-05-28</a:t>
             </a:r>
           </a:p>
         </p:txBody>
@@ -4890,7 +4890,7 @@
                 </a:solidFill>
                 <a:latin typeface="Calibri"/>
               </a:rPr>
-              <a:t>Bid cmd-post-ndi-W50S7626QA001   ·   2026-05-23</a:t>
+              <a:t>Bid cmd-post-ndi-W50S7626QA001   ·   2026-05-28</a:t>
             </a:r>
           </a:p>
         </p:txBody>
